--- a/fp_sfp_presentation_ultra_short.pptx
+++ b/fp_sfp_presentation_ultra_short.pptx
@@ -292,7 +292,7 @@
           <a:bodyPr/>
           <a:lstStyle/>
           <a:p>
-            <a:fld id="{91BB4043-AC71-477C-8A70-8B39AFB25304}" type="datetimeFigureOut">
+            <a:fld id="{03A73CED-FECF-4C51-93C8-5A3DF9F8DDCE}" type="datetimeFigureOut">
               <a:rPr lang="ru-RU" smtClean="0"/>
               <a:t>15.04.2026</a:t>
             </a:fld>
@@ -334,7 +334,7 @@
           <a:bodyPr/>
           <a:lstStyle/>
           <a:p>
-            <a:fld id="{C8CB89A8-202B-48F1-8297-9B337753A2B9}" type="slidenum">
+            <a:fld id="{21490FCB-4618-4EEB-8C15-2EE582FD5B3F}" type="slidenum">
               <a:rPr lang="ru-RU" smtClean="0"/>
               <a:t>‹#›</a:t>
             </a:fld>
@@ -457,7 +457,7 @@
           <a:bodyPr/>
           <a:lstStyle/>
           <a:p>
-            <a:fld id="{91BB4043-AC71-477C-8A70-8B39AFB25304}" type="datetimeFigureOut">
+            <a:fld id="{03A73CED-FECF-4C51-93C8-5A3DF9F8DDCE}" type="datetimeFigureOut">
               <a:rPr lang="ru-RU" smtClean="0"/>
               <a:t>15.04.2026</a:t>
             </a:fld>
@@ -499,7 +499,7 @@
           <a:bodyPr/>
           <a:lstStyle/>
           <a:p>
-            <a:fld id="{C8CB89A8-202B-48F1-8297-9B337753A2B9}" type="slidenum">
+            <a:fld id="{21490FCB-4618-4EEB-8C15-2EE582FD5B3F}" type="slidenum">
               <a:rPr lang="ru-RU" smtClean="0"/>
               <a:t>‹#›</a:t>
             </a:fld>
@@ -632,7 +632,7 @@
           <a:bodyPr/>
           <a:lstStyle/>
           <a:p>
-            <a:fld id="{91BB4043-AC71-477C-8A70-8B39AFB25304}" type="datetimeFigureOut">
+            <a:fld id="{03A73CED-FECF-4C51-93C8-5A3DF9F8DDCE}" type="datetimeFigureOut">
               <a:rPr lang="ru-RU" smtClean="0"/>
               <a:t>15.04.2026</a:t>
             </a:fld>
@@ -674,7 +674,7 @@
           <a:bodyPr/>
           <a:lstStyle/>
           <a:p>
-            <a:fld id="{C8CB89A8-202B-48F1-8297-9B337753A2B9}" type="slidenum">
+            <a:fld id="{21490FCB-4618-4EEB-8C15-2EE582FD5B3F}" type="slidenum">
               <a:rPr lang="ru-RU" smtClean="0"/>
               <a:t>‹#›</a:t>
             </a:fld>
@@ -797,7 +797,7 @@
           <a:bodyPr/>
           <a:lstStyle/>
           <a:p>
-            <a:fld id="{91BB4043-AC71-477C-8A70-8B39AFB25304}" type="datetimeFigureOut">
+            <a:fld id="{03A73CED-FECF-4C51-93C8-5A3DF9F8DDCE}" type="datetimeFigureOut">
               <a:rPr lang="ru-RU" smtClean="0"/>
               <a:t>15.04.2026</a:t>
             </a:fld>
@@ -839,7 +839,7 @@
           <a:bodyPr/>
           <a:lstStyle/>
           <a:p>
-            <a:fld id="{C8CB89A8-202B-48F1-8297-9B337753A2B9}" type="slidenum">
+            <a:fld id="{21490FCB-4618-4EEB-8C15-2EE582FD5B3F}" type="slidenum">
               <a:rPr lang="ru-RU" smtClean="0"/>
               <a:t>‹#›</a:t>
             </a:fld>
@@ -962,7 +962,7 @@
           <a:bodyPr/>
           <a:lstStyle/>
           <a:p>
-            <a:fld id="{91BB4043-AC71-477C-8A70-8B39AFB25304}" type="datetimeFigureOut">
+            <a:fld id="{03A73CED-FECF-4C51-93C8-5A3DF9F8DDCE}" type="datetimeFigureOut">
               <a:rPr lang="ru-RU" smtClean="0"/>
               <a:t>15.04.2026</a:t>
             </a:fld>
@@ -1004,7 +1004,7 @@
           <a:bodyPr/>
           <a:lstStyle/>
           <a:p>
-            <a:fld id="{C8CB89A8-202B-48F1-8297-9B337753A2B9}" type="slidenum">
+            <a:fld id="{21490FCB-4618-4EEB-8C15-2EE582FD5B3F}" type="slidenum">
               <a:rPr lang="ru-RU" smtClean="0"/>
               <a:t>‹#›</a:t>
             </a:fld>
@@ -1203,7 +1203,7 @@
           <a:bodyPr/>
           <a:lstStyle/>
           <a:p>
-            <a:fld id="{91BB4043-AC71-477C-8A70-8B39AFB25304}" type="datetimeFigureOut">
+            <a:fld id="{03A73CED-FECF-4C51-93C8-5A3DF9F8DDCE}" type="datetimeFigureOut">
               <a:rPr lang="ru-RU" smtClean="0"/>
               <a:t>15.04.2026</a:t>
             </a:fld>
@@ -1245,7 +1245,7 @@
           <a:bodyPr/>
           <a:lstStyle/>
           <a:p>
-            <a:fld id="{C8CB89A8-202B-48F1-8297-9B337753A2B9}" type="slidenum">
+            <a:fld id="{21490FCB-4618-4EEB-8C15-2EE582FD5B3F}" type="slidenum">
               <a:rPr lang="ru-RU" smtClean="0"/>
               <a:t>‹#›</a:t>
             </a:fld>
@@ -1486,7 +1486,7 @@
           <a:bodyPr/>
           <a:lstStyle/>
           <a:p>
-            <a:fld id="{91BB4043-AC71-477C-8A70-8B39AFB25304}" type="datetimeFigureOut">
+            <a:fld id="{03A73CED-FECF-4C51-93C8-5A3DF9F8DDCE}" type="datetimeFigureOut">
               <a:rPr lang="ru-RU" smtClean="0"/>
               <a:t>15.04.2026</a:t>
             </a:fld>
@@ -1528,7 +1528,7 @@
           <a:bodyPr/>
           <a:lstStyle/>
           <a:p>
-            <a:fld id="{C8CB89A8-202B-48F1-8297-9B337753A2B9}" type="slidenum">
+            <a:fld id="{21490FCB-4618-4EEB-8C15-2EE582FD5B3F}" type="slidenum">
               <a:rPr lang="ru-RU" smtClean="0"/>
               <a:t>‹#›</a:t>
             </a:fld>
@@ -1903,7 +1903,7 @@
           <a:bodyPr/>
           <a:lstStyle/>
           <a:p>
-            <a:fld id="{91BB4043-AC71-477C-8A70-8B39AFB25304}" type="datetimeFigureOut">
+            <a:fld id="{03A73CED-FECF-4C51-93C8-5A3DF9F8DDCE}" type="datetimeFigureOut">
               <a:rPr lang="ru-RU" smtClean="0"/>
               <a:t>15.04.2026</a:t>
             </a:fld>
@@ -1945,7 +1945,7 @@
           <a:bodyPr/>
           <a:lstStyle/>
           <a:p>
-            <a:fld id="{C8CB89A8-202B-48F1-8297-9B337753A2B9}" type="slidenum">
+            <a:fld id="{21490FCB-4618-4EEB-8C15-2EE582FD5B3F}" type="slidenum">
               <a:rPr lang="ru-RU" smtClean="0"/>
               <a:t>‹#›</a:t>
             </a:fld>
@@ -2016,7 +2016,7 @@
           <a:bodyPr/>
           <a:lstStyle/>
           <a:p>
-            <a:fld id="{91BB4043-AC71-477C-8A70-8B39AFB25304}" type="datetimeFigureOut">
+            <a:fld id="{03A73CED-FECF-4C51-93C8-5A3DF9F8DDCE}" type="datetimeFigureOut">
               <a:rPr lang="ru-RU" smtClean="0"/>
               <a:t>15.04.2026</a:t>
             </a:fld>
@@ -2058,7 +2058,7 @@
           <a:bodyPr/>
           <a:lstStyle/>
           <a:p>
-            <a:fld id="{C8CB89A8-202B-48F1-8297-9B337753A2B9}" type="slidenum">
+            <a:fld id="{21490FCB-4618-4EEB-8C15-2EE582FD5B3F}" type="slidenum">
               <a:rPr lang="ru-RU" smtClean="0"/>
               <a:t>‹#›</a:t>
             </a:fld>
@@ -2106,7 +2106,7 @@
           <a:bodyPr/>
           <a:lstStyle/>
           <a:p>
-            <a:fld id="{91BB4043-AC71-477C-8A70-8B39AFB25304}" type="datetimeFigureOut">
+            <a:fld id="{03A73CED-FECF-4C51-93C8-5A3DF9F8DDCE}" type="datetimeFigureOut">
               <a:rPr lang="ru-RU" smtClean="0"/>
               <a:t>15.04.2026</a:t>
             </a:fld>
@@ -2148,7 +2148,7 @@
           <a:bodyPr/>
           <a:lstStyle/>
           <a:p>
-            <a:fld id="{C8CB89A8-202B-48F1-8297-9B337753A2B9}" type="slidenum">
+            <a:fld id="{21490FCB-4618-4EEB-8C15-2EE582FD5B3F}" type="slidenum">
               <a:rPr lang="ru-RU" smtClean="0"/>
               <a:t>‹#›</a:t>
             </a:fld>
@@ -2378,7 +2378,7 @@
           <a:bodyPr/>
           <a:lstStyle/>
           <a:p>
-            <a:fld id="{91BB4043-AC71-477C-8A70-8B39AFB25304}" type="datetimeFigureOut">
+            <a:fld id="{03A73CED-FECF-4C51-93C8-5A3DF9F8DDCE}" type="datetimeFigureOut">
               <a:rPr lang="ru-RU" smtClean="0"/>
               <a:t>15.04.2026</a:t>
             </a:fld>
@@ -2420,7 +2420,7 @@
           <a:bodyPr/>
           <a:lstStyle/>
           <a:p>
-            <a:fld id="{C8CB89A8-202B-48F1-8297-9B337753A2B9}" type="slidenum">
+            <a:fld id="{21490FCB-4618-4EEB-8C15-2EE582FD5B3F}" type="slidenum">
               <a:rPr lang="ru-RU" smtClean="0"/>
               <a:t>‹#›</a:t>
             </a:fld>
@@ -2626,7 +2626,7 @@
           <a:bodyPr/>
           <a:lstStyle/>
           <a:p>
-            <a:fld id="{91BB4043-AC71-477C-8A70-8B39AFB25304}" type="datetimeFigureOut">
+            <a:fld id="{03A73CED-FECF-4C51-93C8-5A3DF9F8DDCE}" type="datetimeFigureOut">
               <a:rPr lang="ru-RU" smtClean="0"/>
               <a:t>15.04.2026</a:t>
             </a:fld>
@@ -2668,7 +2668,7 @@
           <a:bodyPr/>
           <a:lstStyle/>
           <a:p>
-            <a:fld id="{C8CB89A8-202B-48F1-8297-9B337753A2B9}" type="slidenum">
+            <a:fld id="{21490FCB-4618-4EEB-8C15-2EE582FD5B3F}" type="slidenum">
               <a:rPr lang="ru-RU" smtClean="0"/>
               <a:t>‹#›</a:t>
             </a:fld>
@@ -2834,7 +2834,7 @@
             </a:lvl1pPr>
           </a:lstStyle>
           <a:p>
-            <a:fld id="{91BB4043-AC71-477C-8A70-8B39AFB25304}" type="datetimeFigureOut">
+            <a:fld id="{03A73CED-FECF-4C51-93C8-5A3DF9F8DDCE}" type="datetimeFigureOut">
               <a:rPr lang="ru-RU" smtClean="0"/>
               <a:t>15.04.2026</a:t>
             </a:fld>
@@ -2912,7 +2912,7 @@
             </a:lvl1pPr>
           </a:lstStyle>
           <a:p>
-            <a:fld id="{C8CB89A8-202B-48F1-8297-9B337753A2B9}" type="slidenum">
+            <a:fld id="{21490FCB-4618-4EEB-8C15-2EE582FD5B3F}" type="slidenum">
               <a:rPr lang="ru-RU" smtClean="0"/>
               <a:t>‹#›</a:t>
             </a:fld>
@@ -3247,19 +3247,19 @@
           <a:p>
             <a:r>
               <a:rPr lang="ru-RU" smtClean="0"/>
-              <a:t>- Цель: понять, какие ФП/СФП действительно предсказывают дефолт.</a:t>
-            </a:r>
-          </a:p>
-          <a:p>
-            <a:r>
-              <a:rPr lang="ru-RU" smtClean="0"/>
-              <a:t>- Период: 2023-2025, 9 914 компаний, сегменты МкБ/МСБ/ККБ.</a:t>
-            </a:r>
-          </a:p>
-          <a:p>
-            <a:r>
-              <a:rPr lang="ru-RU" smtClean="0"/>
-              <a:t>- Итог: ключевой сигнал дают комбинации ФП, а не одиночные признаки.</a:t>
+              <a:t>- Основание: 4 финальных отчета (ДМУКП, ДР, динамика ФП, мониторинг).</a:t>
+            </a:r>
+          </a:p>
+          <a:p>
+            <a:r>
+              <a:rPr lang="ru-RU" smtClean="0"/>
+              <a:t>- Период: 2023-2025, база 9 919 ИНН.</a:t>
+            </a:r>
+          </a:p>
+          <a:p>
+            <a:r>
+              <a:rPr lang="ru-RU" smtClean="0"/>
+              <a:t>- Итог: риск определяется сегментной спецификой и комбинациями ФП.</a:t>
             </a:r>
             <a:endParaRPr lang="ru-RU"/>
           </a:p>
@@ -3302,9 +3302,7 @@
         </p:nvSpPr>
         <p:spPr/>
         <p:txBody>
-          <a:bodyPr>
-            <a:normAutofit fontScale="90000"/>
-          </a:bodyPr>
+          <a:bodyPr/>
           <a:lstStyle/>
           <a:p>
             <a:r>
@@ -3332,25 +3330,25 @@
           <a:p>
             <a:r>
               <a:rPr lang="ru-RU" smtClean="0"/>
-              <a:t>- Дефолтные компании имеют больше ФП: 7.7 vs 4.5.</a:t>
-            </a:r>
-          </a:p>
-          <a:p>
-            <a:r>
-              <a:rPr lang="ru-RU" smtClean="0"/>
-              <a:t>- Комбинации резко усиливают риск (Lift до 46.22).</a:t>
-            </a:r>
-          </a:p>
-          <a:p>
-            <a:r>
-              <a:rPr lang="ru-RU" smtClean="0"/>
-              <a:t>- ФП 13 - универсальный маркер риска во всех сегментах.</a:t>
-            </a:r>
-          </a:p>
-          <a:p>
-            <a:r>
-              <a:rPr lang="ru-RU" smtClean="0"/>
-              <a:t>- Сегменты различаются по механике риска, единое правило неэффективно.</a:t>
+              <a:t>- По ДМУКП: 539 дефолтов (5,43%); ККБ 14,13% vs МСБ 5,38% vs МкБ 3,97%.</a:t>
+            </a:r>
+          </a:p>
+          <a:p>
+            <a:r>
+              <a:rPr lang="ru-RU" smtClean="0"/>
+              <a:t>- Фактор 13 - основной триггер дефолта во всех сегментах (54-77%).</a:t>
+            </a:r>
+          </a:p>
+          <a:p>
+            <a:r>
+              <a:rPr lang="ru-RU" smtClean="0"/>
+              <a:t>- Одиночные сильные ФП различаются по сегментам (15.1 / 13.1 / 29.13.11, 34).</a:t>
+            </a:r>
+          </a:p>
+          <a:p>
+            <a:r>
+              <a:rPr lang="ru-RU" smtClean="0"/>
+              <a:t>- Комбинации ФП усиливают сигнал в 2-3 раза относительно одиночных.</a:t>
             </a:r>
             <a:endParaRPr lang="ru-RU"/>
           </a:p>
@@ -3393,9 +3391,7 @@
         </p:nvSpPr>
         <p:spPr/>
         <p:txBody>
-          <a:bodyPr>
-            <a:normAutofit fontScale="90000"/>
-          </a:bodyPr>
+          <a:bodyPr/>
           <a:lstStyle/>
           <a:p>
             <a:r>
@@ -3423,19 +3419,25 @@
           <a:p>
             <a:r>
               <a:rPr lang="ru-RU" smtClean="0"/>
-              <a:t>- В мониторинге есть ошибки и технические статусы.</a:t>
-            </a:r>
-          </a:p>
-          <a:p>
-            <a:r>
-              <a:rPr lang="ru-RU" smtClean="0"/>
-              <a:t>- Это увеличивает шум и ложноположительные срабатывания.</a:t>
-            </a:r>
-          </a:p>
-          <a:p>
-            <a:r>
-              <a:rPr lang="ru-RU" smtClean="0"/>
-              <a:t>- Часть ФП массовые, но слабые; часть редкие, но очень "опасные".</a:t>
+              <a:t>- В сценариях 9,2% ошибок выявления, особенно по СФП.</a:t>
+            </a:r>
+          </a:p>
+          <a:p>
+            <a:r>
+              <a:rPr lang="ru-RU" smtClean="0"/>
+              <a:t>- 1 316 карточек не попали в 6-группный классификатор результатов.</a:t>
+            </a:r>
+          </a:p>
+          <a:p>
+            <a:r>
+              <a:rPr lang="ru-RU" smtClean="0"/>
+              <a:t>- Есть выбросы в датах (нужен контроль качества сроков).</a:t>
+            </a:r>
+          </a:p>
+          <a:p>
+            <a:r>
+              <a:rPr lang="ru-RU" smtClean="0"/>
+              <a:t>- Вывод: главный резерв - качество идентификации и классификации.</a:t>
             </a:r>
             <a:endParaRPr lang="ru-RU"/>
           </a:p>
@@ -3478,9 +3480,7 @@
         </p:nvSpPr>
         <p:spPr/>
         <p:txBody>
-          <a:bodyPr>
-            <a:normAutofit fontScale="90000"/>
-          </a:bodyPr>
+          <a:bodyPr/>
           <a:lstStyle/>
           <a:p>
             <a:r>
@@ -3508,19 +3508,25 @@
           <a:p>
             <a:r>
               <a:rPr lang="ru-RU" smtClean="0"/>
-              <a:t>- МкБ: усилить раннюю эскалацию для связок 13 + 14.3.x + 15.x.</a:t>
-            </a:r>
-          </a:p>
-          <a:p>
-            <a:r>
-              <a:rPr lang="ru-RU" smtClean="0"/>
-              <a:t>- МСБ: повышенный контроль для комбинаций с 15.1.3 и порог поддержки.</a:t>
-            </a:r>
-          </a:p>
-          <a:p>
-            <a:r>
-              <a:rPr lang="ru-RU" smtClean="0"/>
-              <a:t>- Ожидаемый эффект: выше точность раннего захвата дефолтных кейсов.</a:t>
+              <a:t>- МкБ: акцент на семейство 15.1 и раннюю эскалацию комбинаций.</a:t>
+            </a:r>
+          </a:p>
+          <a:p>
+            <a:r>
+              <a:rPr lang="ru-RU" smtClean="0"/>
+              <a:t>- МСБ: приоритет ФП 13.1 и комбинаций с высоким Lift.</a:t>
+            </a:r>
+          </a:p>
+          <a:p>
+            <a:r>
+              <a:rPr lang="ru-RU" smtClean="0"/>
+              <a:t>- Ввести двухконтурный мониторинг: ранние (8-24 мес.) и поздние (1-3 мес.) сигналы.</a:t>
+            </a:r>
+          </a:p>
+          <a:p>
+            <a:r>
+              <a:rPr lang="ru-RU" smtClean="0"/>
+              <a:t>- Ожидаемый эффект: выше точность и раньше реакция.</a:t>
             </a:r>
             <a:endParaRPr lang="ru-RU"/>
           </a:p>
@@ -3563,9 +3569,7 @@
         </p:nvSpPr>
         <p:spPr/>
         <p:txBody>
-          <a:bodyPr>
-            <a:normAutofit fontScale="90000"/>
-          </a:bodyPr>
+          <a:bodyPr/>
           <a:lstStyle/>
           <a:p>
             <a:r>
@@ -3593,19 +3597,25 @@
           <a:p>
             <a:r>
               <a:rPr lang="ru-RU" smtClean="0"/>
-              <a:t>- ККБ: отдельный контур для кластера 29.x с учетом связок 16.x.</a:t>
-            </a:r>
-          </a:p>
-          <a:p>
-            <a:r>
-              <a:rPr lang="ru-RU" smtClean="0"/>
-              <a:t>- Внедрить комбинационные триггеры вместо реакции на одиночные ФП.</a:t>
-            </a:r>
-          </a:p>
-          <a:p>
-            <a:r>
-              <a:rPr lang="ru-RU" smtClean="0"/>
-              <a:t>- Ожидаемый эффект: меньше шума и лучше контроль ковенантного риска.</a:t>
+              <a:t>- ККБ: отдельный контур для кластера 29.x и ФП 34/13.1.</a:t>
+            </a:r>
+          </a:p>
+          <a:p>
+            <a:r>
+              <a:rPr lang="ru-RU" smtClean="0"/>
+              <a:t>- Для всех сегментов: комбинационные триггеры (пары/тройки) вместо одиночных правил.</a:t>
+            </a:r>
+          </a:p>
+          <a:p>
+            <a:r>
+              <a:rPr lang="ru-RU" smtClean="0"/>
+              <a:t>- В мониторинге: пересмотр критериев СФП (40.1, 15.2У) и ФП 16.1.</a:t>
+            </a:r>
+          </a:p>
+          <a:p>
+            <a:r>
+              <a:rPr lang="ru-RU" smtClean="0"/>
+              <a:t>- Ожидаемый эффект: меньше ложных срабатываний и лучше DR capture.</a:t>
             </a:r>
             <a:endParaRPr lang="ru-RU"/>
           </a:p>
@@ -3676,7 +3686,7 @@
           <a:p>
             <a:r>
               <a:rPr lang="ru-RU" smtClean="0"/>
-              <a:t>- 0-3 месяца: очистка статусов мониторинга, маркировка редких ФП.</a:t>
+              <a:t>- 0-3 месяца: очистка классификатора результатов и правил идентификации СФП.</a:t>
             </a:r>
           </a:p>
           <a:p>
@@ -3688,7 +3698,7 @@
           <a:p>
             <a:r>
               <a:rPr lang="ru-RU" smtClean="0"/>
-              <a:t>- 6+ месяцев: переоценка устойчивости на новых когортах.</a:t>
+              <a:t>- 6+ месяцев: регулярная валидация эффектов на новых когортах.</a:t>
             </a:r>
             <a:endParaRPr lang="ru-RU"/>
           </a:p>
@@ -3759,19 +3769,19 @@
           <a:p>
             <a:r>
               <a:rPr lang="ru-RU" smtClean="0"/>
-              <a:t>- Утвердить переход к сегментным комбинационным правилам.</a:t>
-            </a:r>
-          </a:p>
-          <a:p>
-            <a:r>
-              <a:rPr lang="ru-RU" smtClean="0"/>
-              <a:t>- KPI контроля: ложные срабатывания, DR capture, стабильность Lift.</a:t>
-            </a:r>
-          </a:p>
-          <a:p>
-            <a:r>
-              <a:rPr lang="ru-RU" smtClean="0"/>
-              <a:t>- Запустить пилот и квартальный review результатов.</a:t>
+              <a:t>- Утвердить переход к сегментной модели мониторинга.</a:t>
+            </a:r>
+          </a:p>
+          <a:p>
+            <a:r>
+              <a:rPr lang="ru-RU" smtClean="0"/>
+              <a:t>- KPI: ошибки выявления, доля активных ИПУ, срок урегулирования, DR capture.</a:t>
+            </a:r>
+          </a:p>
+          <a:p>
+            <a:r>
+              <a:rPr lang="ru-RU" smtClean="0"/>
+              <a:t>- Запустить пилот и квартальный review по каждому сегменту.</a:t>
             </a:r>
             <a:endParaRPr lang="ru-RU"/>
           </a:p>
